--- a/Day16-Data-Pipelines-Spark-and-PySpark/Day16_Deck_Data_Pipelines_Spark_and_PySpark.pptx
+++ b/Day16-Data-Pipelines-Spark-and-PySpark/Day16_Deck_Data_Pipelines_Spark_and_PySpark.pptx
@@ -3868,13 +3868,13 @@
           <a:noFill/>
         </p:spPr>
         <p:txBody>
-          <a:bodyPr wrap="square" lIns="0" rIns="0" tIns="0" bIns="0" anchor="t">
-            <a:spAutoFit/>
-          </a:bodyPr>
-          <a:lstStyle/>
-          <a:p>
-            <a:r>
-              <a:rPr sz="1019" b="0" i="0">
+          <a:bodyPr wrap="none" lIns="0" rIns="0" tIns="0" bIns="0" anchor="t">
+            <a:spAutoFit/>
+          </a:bodyPr>
+          <a:lstStyle/>
+          <a:p>
+            <a:r>
+              <a:rPr sz="897" b="0" i="0">
                 <a:solidFill>
                   <a:srgbClr val="EAF7F5"/>
                 </a:solidFill>
@@ -3885,7 +3885,7 @@
           </a:p>
           <a:p>
             <a:r>
-              <a:rPr sz="1019" b="0" i="0">
+              <a:rPr sz="897" b="0" i="0">
                 <a:solidFill>
                   <a:srgbClr val="EAF7F5"/>
                 </a:solidFill>
@@ -3896,7 +3896,7 @@
           </a:p>
           <a:p>
             <a:r>
-              <a:rPr sz="1019" b="0" i="0">
+              <a:rPr sz="897" b="0" i="0">
                 <a:solidFill>
                   <a:srgbClr val="EAF7F5"/>
                 </a:solidFill>
@@ -3907,7 +3907,7 @@
           </a:p>
           <a:p>
             <a:r>
-              <a:rPr sz="1019" b="0" i="0">
+              <a:rPr sz="897" b="0" i="0">
                 <a:solidFill>
                   <a:srgbClr val="EAF7F5"/>
                 </a:solidFill>
@@ -3918,7 +3918,7 @@
           </a:p>
           <a:p>
             <a:r>
-              <a:rPr sz="1019" b="0" i="0">
+              <a:rPr sz="897" b="0" i="0">
                 <a:solidFill>
                   <a:srgbClr val="EAF7F5"/>
                 </a:solidFill>
@@ -3929,7 +3929,7 @@
           </a:p>
           <a:p>
             <a:r>
-              <a:rPr sz="1019" b="0" i="0">
+              <a:rPr sz="897" b="0" i="0">
                 <a:solidFill>
                   <a:srgbClr val="EAF7F5"/>
                 </a:solidFill>
@@ -3940,7 +3940,7 @@
           </a:p>
           <a:p>
             <a:r>
-              <a:rPr sz="1019" b="0" i="0">
+              <a:rPr sz="897" b="0" i="0">
                 <a:solidFill>
                   <a:srgbClr val="EAF7F5"/>
                 </a:solidFill>
@@ -3951,7 +3951,7 @@
           </a:p>
           <a:p>
             <a:r>
-              <a:rPr sz="1019" b="0" i="0">
+              <a:rPr sz="897" b="0" i="0">
                 <a:solidFill>
                   <a:srgbClr val="EAF7F5"/>
                 </a:solidFill>
@@ -3962,7 +3962,7 @@
           </a:p>
           <a:p>
             <a:r>
-              <a:rPr sz="1019" b="0" i="0">
+              <a:rPr sz="897" b="0" i="0">
                 <a:solidFill>
                   <a:srgbClr val="EAF7F5"/>
                 </a:solidFill>
@@ -3973,7 +3973,7 @@
           </a:p>
           <a:p>
             <a:r>
-              <a:rPr sz="1019" b="0" i="0">
+              <a:rPr sz="897" b="0" i="0">
                 <a:solidFill>
                   <a:srgbClr val="EAF7F5"/>
                 </a:solidFill>
@@ -3984,7 +3984,7 @@
           </a:p>
           <a:p>
             <a:r>
-              <a:rPr sz="1019" b="0" i="0">
+              <a:rPr sz="897" b="0" i="0">
                 <a:solidFill>
                   <a:srgbClr val="EAF7F5"/>
                 </a:solidFill>
@@ -4701,13 +4701,13 @@
           <a:noFill/>
         </p:spPr>
         <p:txBody>
-          <a:bodyPr wrap="square" lIns="0" rIns="0" tIns="0" bIns="0" anchor="t">
-            <a:spAutoFit/>
-          </a:bodyPr>
-          <a:lstStyle/>
-          <a:p>
-            <a:r>
-              <a:rPr sz="1307" b="0" i="0">
+          <a:bodyPr wrap="none" lIns="0" rIns="0" tIns="0" bIns="0" anchor="t">
+            <a:spAutoFit/>
+          </a:bodyPr>
+          <a:lstStyle/>
+          <a:p>
+            <a:r>
+              <a:rPr sz="1150" b="0" i="0">
                 <a:solidFill>
                   <a:srgbClr val="EAF7F5"/>
                 </a:solidFill>
@@ -4718,7 +4718,7 @@
           </a:p>
           <a:p>
             <a:r>
-              <a:rPr sz="1307" b="0" i="0">
+              <a:rPr sz="1150" b="0" i="0">
                 <a:solidFill>
                   <a:srgbClr val="EAF7F5"/>
                 </a:solidFill>
@@ -4729,7 +4729,7 @@
           </a:p>
           <a:p>
             <a:r>
-              <a:rPr sz="1307" b="0" i="0">
+              <a:rPr sz="1150" b="0" i="0">
                 <a:solidFill>
                   <a:srgbClr val="EAF7F5"/>
                 </a:solidFill>
@@ -4740,7 +4740,7 @@
           </a:p>
           <a:p>
             <a:r>
-              <a:rPr sz="1307" b="0" i="0">
+              <a:rPr sz="1150" b="0" i="0">
                 <a:solidFill>
                   <a:srgbClr val="EAF7F5"/>
                 </a:solidFill>
@@ -4751,7 +4751,7 @@
           </a:p>
           <a:p>
             <a:r>
-              <a:rPr sz="1307" b="0" i="0">
+              <a:rPr sz="1150" b="0" i="0">
                 <a:solidFill>
                   <a:srgbClr val="EAF7F5"/>
                 </a:solidFill>
@@ -4762,7 +4762,7 @@
           </a:p>
           <a:p>
             <a:r>
-              <a:rPr sz="1307" b="0" i="0">
+              <a:rPr sz="1150" b="0" i="0">
                 <a:solidFill>
                   <a:srgbClr val="EAF7F5"/>
                 </a:solidFill>
@@ -4773,7 +4773,7 @@
           </a:p>
           <a:p>
             <a:r>
-              <a:rPr sz="1307" b="0" i="0">
+              <a:rPr sz="1150" b="0" i="0">
                 <a:solidFill>
                   <a:srgbClr val="EAF7F5"/>
                 </a:solidFill>
@@ -4784,7 +4784,7 @@
           </a:p>
           <a:p>
             <a:r>
-              <a:rPr sz="1307" b="0" i="0">
+              <a:rPr sz="1150" b="0" i="0">
                 <a:solidFill>
                   <a:srgbClr val="EAF7F5"/>
                 </a:solidFill>
@@ -4795,7 +4795,7 @@
           </a:p>
           <a:p>
             <a:r>
-              <a:rPr sz="1307" b="0" i="0">
+              <a:rPr sz="1150" b="0" i="0">
                 <a:solidFill>
                   <a:srgbClr val="EAF7F5"/>
                 </a:solidFill>
@@ -5083,13 +5083,13 @@
           <a:noFill/>
         </p:spPr>
         <p:txBody>
-          <a:bodyPr wrap="square" lIns="0" rIns="0" tIns="0" bIns="0" anchor="t">
-            <a:spAutoFit/>
-          </a:bodyPr>
-          <a:lstStyle/>
-          <a:p>
-            <a:r>
-              <a:rPr sz="1275" b="0" i="0">
+          <a:bodyPr wrap="none" lIns="0" rIns="0" tIns="0" bIns="0" anchor="t">
+            <a:spAutoFit/>
+          </a:bodyPr>
+          <a:lstStyle/>
+          <a:p>
+            <a:r>
+              <a:rPr sz="1122" b="0" i="0">
                 <a:solidFill>
                   <a:srgbClr val="EAF7F5"/>
                 </a:solidFill>
@@ -5100,7 +5100,7 @@
           </a:p>
           <a:p>
             <a:r>
-              <a:rPr sz="1275" b="0" i="0">
+              <a:rPr sz="1122" b="0" i="0">
                 <a:solidFill>
                   <a:srgbClr val="EAF7F5"/>
                 </a:solidFill>
@@ -5111,7 +5111,7 @@
           </a:p>
           <a:p>
             <a:r>
-              <a:rPr sz="1275" b="0" i="0">
+              <a:rPr sz="1122" b="0" i="0">
                 <a:solidFill>
                   <a:srgbClr val="EAF7F5"/>
                 </a:solidFill>
@@ -5122,7 +5122,7 @@
           </a:p>
           <a:p>
             <a:r>
-              <a:rPr sz="1275" b="0" i="0">
+              <a:rPr sz="1122" b="0" i="0">
                 <a:solidFill>
                   <a:srgbClr val="EAF7F5"/>
                 </a:solidFill>
@@ -5133,7 +5133,7 @@
           </a:p>
           <a:p>
             <a:r>
-              <a:rPr sz="1275" b="0" i="0">
+              <a:rPr sz="1122" b="0" i="0">
                 <a:solidFill>
                   <a:srgbClr val="EAF7F5"/>
                 </a:solidFill>
@@ -5144,7 +5144,7 @@
           </a:p>
           <a:p>
             <a:r>
-              <a:rPr sz="1275" b="0" i="0">
+              <a:rPr sz="1122" b="0" i="0">
                 <a:solidFill>
                   <a:srgbClr val="EAF7F5"/>
                 </a:solidFill>
@@ -5155,7 +5155,7 @@
           </a:p>
           <a:p>
             <a:r>
-              <a:rPr sz="1275" b="0" i="0">
+              <a:rPr sz="1122" b="0" i="0">
                 <a:solidFill>
                   <a:srgbClr val="EAF7F5"/>
                 </a:solidFill>
@@ -5166,7 +5166,7 @@
           </a:p>
           <a:p>
             <a:r>
-              <a:rPr sz="1275" b="0" i="0">
+              <a:rPr sz="1122" b="0" i="0">
                 <a:solidFill>
                   <a:srgbClr val="EAF7F5"/>
                 </a:solidFill>
@@ -5177,7 +5177,7 @@
           </a:p>
           <a:p>
             <a:r>
-              <a:rPr sz="1275" b="0" i="0">
+              <a:rPr sz="1122" b="0" i="0">
                 <a:solidFill>
                   <a:srgbClr val="EAF7F5"/>
                 </a:solidFill>
@@ -5995,13 +5995,13 @@
           <a:noFill/>
         </p:spPr>
         <p:txBody>
-          <a:bodyPr wrap="square" lIns="0" rIns="0" tIns="0" bIns="0" anchor="t">
-            <a:spAutoFit/>
-          </a:bodyPr>
-          <a:lstStyle/>
-          <a:p>
-            <a:r>
-              <a:rPr sz="910" b="0" i="0">
+          <a:bodyPr wrap="none" lIns="0" rIns="0" tIns="0" bIns="0" anchor="t">
+            <a:spAutoFit/>
+          </a:bodyPr>
+          <a:lstStyle/>
+          <a:p>
+            <a:r>
+              <a:rPr sz="801" b="0" i="0">
                 <a:solidFill>
                   <a:srgbClr val="EAF7F5"/>
                 </a:solidFill>
@@ -6012,7 +6012,7 @@
           </a:p>
           <a:p>
             <a:r>
-              <a:rPr sz="910" b="0" i="0">
+              <a:rPr sz="801" b="0" i="0">
                 <a:solidFill>
                   <a:srgbClr val="EAF7F5"/>
                 </a:solidFill>
@@ -6023,7 +6023,7 @@
           </a:p>
           <a:p>
             <a:r>
-              <a:rPr sz="910" b="0" i="0">
+              <a:rPr sz="801" b="0" i="0">
                 <a:solidFill>
                   <a:srgbClr val="EAF7F5"/>
                 </a:solidFill>
@@ -6034,7 +6034,7 @@
           </a:p>
           <a:p>
             <a:r>
-              <a:rPr sz="910" b="0" i="0">
+              <a:rPr sz="801" b="0" i="0">
                 <a:solidFill>
                   <a:srgbClr val="EAF7F5"/>
                 </a:solidFill>
@@ -6045,7 +6045,7 @@
           </a:p>
           <a:p>
             <a:r>
-              <a:rPr sz="910" b="0" i="0">
+              <a:rPr sz="801" b="0" i="0">
                 <a:solidFill>
                   <a:srgbClr val="EAF7F5"/>
                 </a:solidFill>
@@ -6056,7 +6056,7 @@
           </a:p>
           <a:p>
             <a:r>
-              <a:rPr sz="910" b="0" i="0">
+              <a:rPr sz="801" b="0" i="0">
                 <a:solidFill>
                   <a:srgbClr val="EAF7F5"/>
                 </a:solidFill>
@@ -6067,7 +6067,7 @@
           </a:p>
           <a:p>
             <a:r>
-              <a:rPr sz="910" b="0" i="0">
+              <a:rPr sz="801" b="0" i="0">
                 <a:solidFill>
                   <a:srgbClr val="EAF7F5"/>
                 </a:solidFill>
@@ -6078,7 +6078,7 @@
           </a:p>
           <a:p>
             <a:r>
-              <a:rPr sz="910" b="0" i="0">
+              <a:rPr sz="801" b="0" i="0">
                 <a:solidFill>
                   <a:srgbClr val="EAF7F5"/>
                 </a:solidFill>
@@ -6089,7 +6089,7 @@
           </a:p>
           <a:p>
             <a:r>
-              <a:rPr sz="910" b="0" i="0">
+              <a:rPr sz="801" b="0" i="0">
                 <a:solidFill>
                   <a:srgbClr val="EAF7F5"/>
                 </a:solidFill>
@@ -6100,7 +6100,7 @@
           </a:p>
           <a:p>
             <a:r>
-              <a:rPr sz="910" b="0" i="0">
+              <a:rPr sz="801" b="0" i="0">
                 <a:solidFill>
                   <a:srgbClr val="EAF7F5"/>
                 </a:solidFill>
@@ -7183,13 +7183,13 @@
           <a:noFill/>
         </p:spPr>
         <p:txBody>
-          <a:bodyPr wrap="square" lIns="0" rIns="0" tIns="0" bIns="0" anchor="t">
-            <a:spAutoFit/>
-          </a:bodyPr>
-          <a:lstStyle/>
-          <a:p>
-            <a:r>
-              <a:rPr sz="1400" b="0" i="0">
+          <a:bodyPr wrap="none" lIns="0" rIns="0" tIns="0" bIns="0" anchor="t">
+            <a:spAutoFit/>
+          </a:bodyPr>
+          <a:lstStyle/>
+          <a:p>
+            <a:r>
+              <a:rPr sz="1360" b="0" i="0">
                 <a:solidFill>
                   <a:srgbClr val="EAF7F5"/>
                 </a:solidFill>
@@ -7200,7 +7200,7 @@
           </a:p>
           <a:p>
             <a:r>
-              <a:rPr sz="1400" b="0" i="0">
+              <a:rPr sz="1360" b="0" i="0">
                 <a:solidFill>
                   <a:srgbClr val="EAF7F5"/>
                 </a:solidFill>
@@ -7211,7 +7211,7 @@
           </a:p>
           <a:p>
             <a:r>
-              <a:rPr sz="1400" b="0" i="0">
+              <a:rPr sz="1360" b="0" i="0">
                 <a:solidFill>
                   <a:srgbClr val="EAF7F5"/>
                 </a:solidFill>
@@ -7222,7 +7222,7 @@
           </a:p>
           <a:p>
             <a:r>
-              <a:rPr sz="1400" b="0" i="0">
+              <a:rPr sz="1360" b="0" i="0">
                 <a:solidFill>
                   <a:srgbClr val="EAF7F5"/>
                 </a:solidFill>
@@ -7233,7 +7233,7 @@
           </a:p>
           <a:p>
             <a:r>
-              <a:rPr sz="1400" b="0" i="0">
+              <a:rPr sz="1360" b="0" i="0">
                 <a:solidFill>
                   <a:srgbClr val="EAF7F5"/>
                 </a:solidFill>
@@ -7244,7 +7244,7 @@
           </a:p>
           <a:p>
             <a:r>
-              <a:rPr sz="1400" b="0" i="0">
+              <a:rPr sz="1360" b="0" i="0">
                 <a:solidFill>
                   <a:srgbClr val="EAF7F5"/>
                 </a:solidFill>
@@ -7255,7 +7255,7 @@
           </a:p>
           <a:p>
             <a:r>
-              <a:rPr sz="1400" b="0" i="0">
+              <a:rPr sz="1360" b="0" i="0">
                 <a:solidFill>
                   <a:srgbClr val="EAF7F5"/>
                 </a:solidFill>
@@ -7266,7 +7266,7 @@
           </a:p>
           <a:p>
             <a:r>
-              <a:rPr sz="1400" b="0" i="0">
+              <a:rPr sz="1360" b="0" i="0">
                 <a:solidFill>
                   <a:srgbClr val="EAF7F5"/>
                 </a:solidFill>
@@ -7277,7 +7277,7 @@
           </a:p>
           <a:p>
             <a:r>
-              <a:rPr sz="1400" b="0" i="0">
+              <a:rPr sz="1360" b="0" i="0">
                 <a:solidFill>
                   <a:srgbClr val="EAF7F5"/>
                 </a:solidFill>
@@ -7288,7 +7288,7 @@
           </a:p>
           <a:p>
             <a:r>
-              <a:rPr sz="1400" b="0" i="0">
+              <a:rPr sz="1360" b="0" i="0">
                 <a:solidFill>
                   <a:srgbClr val="EAF7F5"/>
                 </a:solidFill>
@@ -7299,7 +7299,7 @@
           </a:p>
           <a:p>
             <a:r>
-              <a:rPr sz="1400" b="0" i="0">
+              <a:rPr sz="1360" b="0" i="0">
                 <a:solidFill>
                   <a:srgbClr val="EAF7F5"/>
                 </a:solidFill>
@@ -8897,13 +8897,13 @@
           <a:noFill/>
         </p:spPr>
         <p:txBody>
-          <a:bodyPr wrap="square" lIns="0" rIns="0" tIns="0" bIns="0" anchor="t">
-            <a:spAutoFit/>
-          </a:bodyPr>
-          <a:lstStyle/>
-          <a:p>
-            <a:r>
-              <a:rPr sz="1275" b="0" i="0">
+          <a:bodyPr wrap="none" lIns="0" rIns="0" tIns="0" bIns="0" anchor="t">
+            <a:spAutoFit/>
+          </a:bodyPr>
+          <a:lstStyle/>
+          <a:p>
+            <a:r>
+              <a:rPr sz="1122" b="0" i="0">
                 <a:solidFill>
                   <a:srgbClr val="EAF7F5"/>
                 </a:solidFill>
@@ -8914,7 +8914,7 @@
           </a:p>
           <a:p>
             <a:r>
-              <a:rPr sz="1275" b="0" i="0">
+              <a:rPr sz="1122" b="0" i="0">
                 <a:solidFill>
                   <a:srgbClr val="EAF7F5"/>
                 </a:solidFill>
@@ -8925,7 +8925,7 @@
           </a:p>
           <a:p>
             <a:r>
-              <a:rPr sz="1275" b="0" i="0">
+              <a:rPr sz="1122" b="0" i="0">
                 <a:solidFill>
                   <a:srgbClr val="EAF7F5"/>
                 </a:solidFill>
@@ -8936,7 +8936,7 @@
           </a:p>
           <a:p>
             <a:r>
-              <a:rPr sz="1275" b="0" i="0">
+              <a:rPr sz="1122" b="0" i="0">
                 <a:solidFill>
                   <a:srgbClr val="EAF7F5"/>
                 </a:solidFill>
@@ -8947,7 +8947,7 @@
           </a:p>
           <a:p>
             <a:r>
-              <a:rPr sz="1275" b="0" i="0">
+              <a:rPr sz="1122" b="0" i="0">
                 <a:solidFill>
                   <a:srgbClr val="EAF7F5"/>
                 </a:solidFill>
@@ -8958,7 +8958,7 @@
           </a:p>
           <a:p>
             <a:r>
-              <a:rPr sz="1275" b="0" i="0">
+              <a:rPr sz="1122" b="0" i="0">
                 <a:solidFill>
                   <a:srgbClr val="EAF7F5"/>
                 </a:solidFill>
@@ -8969,7 +8969,7 @@
           </a:p>
           <a:p>
             <a:r>
-              <a:rPr sz="1275" b="0" i="0">
+              <a:rPr sz="1122" b="0" i="0">
                 <a:solidFill>
                   <a:srgbClr val="EAF7F5"/>
                 </a:solidFill>
@@ -8980,7 +8980,7 @@
           </a:p>
           <a:p>
             <a:r>
-              <a:rPr sz="1275" b="0" i="0">
+              <a:rPr sz="1122" b="0" i="0">
                 <a:solidFill>
                   <a:srgbClr val="EAF7F5"/>
                 </a:solidFill>
@@ -8991,7 +8991,7 @@
           </a:p>
           <a:p>
             <a:r>
-              <a:rPr sz="1275" b="0" i="0">
+              <a:rPr sz="1122" b="0" i="0">
                 <a:solidFill>
                   <a:srgbClr val="EAF7F5"/>
                 </a:solidFill>
@@ -14015,13 +14015,13 @@
           <a:noFill/>
         </p:spPr>
         <p:txBody>
-          <a:bodyPr wrap="square" lIns="0" rIns="0" tIns="0" bIns="0" anchor="t">
-            <a:spAutoFit/>
-          </a:bodyPr>
-          <a:lstStyle/>
-          <a:p>
-            <a:r>
-              <a:rPr sz="1011" b="0" i="0">
+          <a:bodyPr wrap="none" lIns="0" rIns="0" tIns="0" bIns="0" anchor="t">
+            <a:spAutoFit/>
+          </a:bodyPr>
+          <a:lstStyle/>
+          <a:p>
+            <a:r>
+              <a:rPr sz="890" b="0" i="0">
                 <a:solidFill>
                   <a:srgbClr val="EAF7F5"/>
                 </a:solidFill>
@@ -14032,7 +14032,7 @@
           </a:p>
           <a:p>
             <a:r>
-              <a:rPr sz="1011" b="0" i="0">
+              <a:rPr sz="890" b="0" i="0">
                 <a:solidFill>
                   <a:srgbClr val="EAF7F5"/>
                 </a:solidFill>
@@ -14043,7 +14043,7 @@
           </a:p>
           <a:p>
             <a:r>
-              <a:rPr sz="1011" b="0" i="0">
+              <a:rPr sz="890" b="0" i="0">
                 <a:solidFill>
                   <a:srgbClr val="EAF7F5"/>
                 </a:solidFill>
@@ -14054,7 +14054,7 @@
           </a:p>
           <a:p>
             <a:r>
-              <a:rPr sz="1011" b="0" i="0">
+              <a:rPr sz="890" b="0" i="0">
                 <a:solidFill>
                   <a:srgbClr val="EAF7F5"/>
                 </a:solidFill>
@@ -14065,7 +14065,7 @@
           </a:p>
           <a:p>
             <a:r>
-              <a:rPr sz="1011" b="0" i="0">
+              <a:rPr sz="890" b="0" i="0">
                 <a:solidFill>
                   <a:srgbClr val="EAF7F5"/>
                 </a:solidFill>
@@ -14076,7 +14076,7 @@
           </a:p>
           <a:p>
             <a:r>
-              <a:rPr sz="1011" b="0" i="0">
+              <a:rPr sz="890" b="0" i="0">
                 <a:solidFill>
                   <a:srgbClr val="EAF7F5"/>
                 </a:solidFill>
